--- a/docs/presentaciones/classes/clase-161-rl-aprendizaje-por-recompensa-openai-gymnasium-presentacion.pptx
+++ b/docs/presentaciones/classes/clase-161-rl-aprendizaje-por-recompensa-openai-gymnasium-presentacion.pptx
@@ -4910,7 +4910,368 @@
                 </a:solidFill>
                 <a:latin typeface="Courier New"/>
               </a:rPr>
-              <a:t># Imports y configuración inicial</a:t>
+              <a:t>import numpy as np</a:t>
+            </a:r>
+          </a:p>
+          <a:p>
+            <a:pPr>
+              <a:defRPr sz="1200" b="0">
+                <a:solidFill>
+                  <a:srgbClr val="F8FAFC"/>
+                </a:solidFill>
+                <a:latin typeface="Courier New"/>
+              </a:defRPr>
+            </a:pPr>
+            <a:r>
+              <a:rPr sz="1200" b="0">
+                <a:solidFill>
+                  <a:srgbClr val="F8FAFC"/>
+                </a:solidFill>
+                <a:latin typeface="Courier New"/>
+              </a:rPr>
+              <a:t>np.random.seed(42)</a:t>
+            </a:r>
+          </a:p>
+          <a:p>
+            <a:pPr>
+              <a:defRPr sz="1200" b="0">
+                <a:solidFill>
+                  <a:srgbClr val="F8FAFC"/>
+                </a:solidFill>
+                <a:latin typeface="Courier New"/>
+              </a:defRPr>
+            </a:pPr>
+            <a:r>
+              <a:rPr sz="1200" b="0">
+                <a:solidFill>
+                  <a:srgbClr val="F8FAFC"/>
+                </a:solidFill>
+                <a:latin typeface="Courier New"/>
+              </a:rPr>
+              <a:t> </a:t>
+            </a:r>
+          </a:p>
+          <a:p>
+            <a:pPr>
+              <a:defRPr sz="1200" b="0">
+                <a:solidFill>
+                  <a:srgbClr val="F8FAFC"/>
+                </a:solidFill>
+                <a:latin typeface="Courier New"/>
+              </a:defRPr>
+            </a:pPr>
+            <a:r>
+              <a:rPr sz="1200" b="0">
+                <a:solidFill>
+                  <a:srgbClr val="F8FAFC"/>
+                </a:solidFill>
+                <a:latin typeface="Courier New"/>
+              </a:rPr>
+              <a:t>try:</a:t>
+            </a:r>
+          </a:p>
+          <a:p>
+            <a:pPr>
+              <a:defRPr sz="1200" b="0">
+                <a:solidFill>
+                  <a:srgbClr val="F8FAFC"/>
+                </a:solidFill>
+                <a:latin typeface="Courier New"/>
+              </a:defRPr>
+            </a:pPr>
+            <a:r>
+              <a:rPr sz="1200" b="0">
+                <a:solidFill>
+                  <a:srgbClr val="F8FAFC"/>
+                </a:solidFill>
+                <a:latin typeface="Courier New"/>
+              </a:rPr>
+              <a:t>    import gymnasium as gym</a:t>
+            </a:r>
+          </a:p>
+          <a:p>
+            <a:pPr>
+              <a:defRPr sz="1200" b="0">
+                <a:solidFill>
+                  <a:srgbClr val="F8FAFC"/>
+                </a:solidFill>
+                <a:latin typeface="Courier New"/>
+              </a:defRPr>
+            </a:pPr>
+            <a:r>
+              <a:rPr sz="1200" b="0">
+                <a:solidFill>
+                  <a:srgbClr val="F8FAFC"/>
+                </a:solidFill>
+                <a:latin typeface="Courier New"/>
+              </a:rPr>
+              <a:t>    GYM_OK = True</a:t>
+            </a:r>
+          </a:p>
+          <a:p>
+            <a:pPr>
+              <a:defRPr sz="1200" b="0">
+                <a:solidFill>
+                  <a:srgbClr val="F8FAFC"/>
+                </a:solidFill>
+                <a:latin typeface="Courier New"/>
+              </a:defRPr>
+            </a:pPr>
+            <a:r>
+              <a:rPr sz="1200" b="0">
+                <a:solidFill>
+                  <a:srgbClr val="F8FAFC"/>
+                </a:solidFill>
+                <a:latin typeface="Courier New"/>
+              </a:rPr>
+              <a:t>    print("gymnasium", gym.__version__)</a:t>
+            </a:r>
+          </a:p>
+          <a:p>
+            <a:pPr>
+              <a:defRPr sz="1200" b="0">
+                <a:solidFill>
+                  <a:srgbClr val="F8FAFC"/>
+                </a:solidFill>
+                <a:latin typeface="Courier New"/>
+              </a:defRPr>
+            </a:pPr>
+            <a:r>
+              <a:rPr sz="1200" b="0">
+                <a:solidFill>
+                  <a:srgbClr val="F8FAFC"/>
+                </a:solidFill>
+                <a:latin typeface="Courier New"/>
+              </a:rPr>
+              <a:t>except Exception:</a:t>
+            </a:r>
+          </a:p>
+          <a:p>
+            <a:pPr>
+              <a:defRPr sz="1200" b="0">
+                <a:solidFill>
+                  <a:srgbClr val="F8FAFC"/>
+                </a:solidFill>
+                <a:latin typeface="Courier New"/>
+              </a:defRPr>
+            </a:pPr>
+            <a:r>
+              <a:rPr sz="1200" b="0">
+                <a:solidFill>
+                  <a:srgbClr val="F8FAFC"/>
+                </a:solidFill>
+                <a:latin typeface="Courier New"/>
+              </a:rPr>
+              <a:t>    GYM_OK = False</a:t>
+            </a:r>
+          </a:p>
+          <a:p>
+            <a:pPr>
+              <a:defRPr sz="1200" b="0">
+                <a:solidFill>
+                  <a:srgbClr val="F8FAFC"/>
+                </a:solidFill>
+                <a:latin typeface="Courier New"/>
+              </a:defRPr>
+            </a:pPr>
+            <a:r>
+              <a:rPr sz="1200" b="0">
+                <a:solidFill>
+                  <a:srgbClr val="F8FAFC"/>
+                </a:solidFill>
+                <a:latin typeface="Courier New"/>
+              </a:rPr>
+              <a:t>    print("gymnasium no instalado -&gt; se muestra la API correcta (celdas de gym no se ejecutan)")</a:t>
+            </a:r>
+          </a:p>
+          <a:p>
+            <a:pPr>
+              <a:defRPr sz="1200" b="0">
+                <a:solidFill>
+                  <a:srgbClr val="F8FAFC"/>
+                </a:solidFill>
+                <a:latin typeface="Courier New"/>
+              </a:defRPr>
+            </a:pPr>
+            <a:r>
+              <a:rPr sz="1200" b="0">
+                <a:solidFill>
+                  <a:srgbClr val="F8FAFC"/>
+                </a:solidFill>
+                <a:latin typeface="Courier New"/>
+              </a:rPr>
+              <a:t> </a:t>
+            </a:r>
+          </a:p>
+          <a:p>
+            <a:pPr>
+              <a:defRPr sz="1200" b="0">
+                <a:solidFill>
+                  <a:srgbClr val="F8FAFC"/>
+                </a:solidFill>
+                <a:latin typeface="Courier New"/>
+              </a:defRPr>
+            </a:pPr>
+            <a:r>
+              <a:rPr sz="1200" b="0">
+                <a:solidFill>
+                  <a:srgbClr val="F8FAFC"/>
+                </a:solidFill>
+                <a:latin typeface="Courier New"/>
+              </a:rPr>
+              <a:t>if GYM_OK:</a:t>
+            </a:r>
+          </a:p>
+          <a:p>
+            <a:pPr>
+              <a:defRPr sz="1200" b="0">
+                <a:solidFill>
+                  <a:srgbClr val="F8FAFC"/>
+                </a:solidFill>
+                <a:latin typeface="Courier New"/>
+              </a:defRPr>
+            </a:pPr>
+            <a:r>
+              <a:rPr sz="1200" b="0">
+                <a:solidFill>
+                  <a:srgbClr val="F8FAFC"/>
+                </a:solidFill>
+                <a:latin typeface="Courier New"/>
+              </a:rPr>
+              <a:t>    env = gym.make("CartPole-v1")</a:t>
+            </a:r>
+          </a:p>
+          <a:p>
+            <a:pPr>
+              <a:defRPr sz="1200" b="0">
+                <a:solidFill>
+                  <a:srgbClr val="F8FAFC"/>
+                </a:solidFill>
+                <a:latin typeface="Courier New"/>
+              </a:defRPr>
+            </a:pPr>
+            <a:r>
+              <a:rPr sz="1200" b="0">
+                <a:solidFill>
+                  <a:srgbClr val="F8FAFC"/>
+                </a:solidFill>
+                <a:latin typeface="Courier New"/>
+              </a:rPr>
+              <a:t>    print("observation_space:", env.observation_space)   # Box(4,) float32</a:t>
+            </a:r>
+          </a:p>
+          <a:p>
+            <a:pPr>
+              <a:defRPr sz="1200" b="0">
+                <a:solidFill>
+                  <a:srgbClr val="F8FAFC"/>
+                </a:solidFill>
+                <a:latin typeface="Courier New"/>
+              </a:defRPr>
+            </a:pPr>
+            <a:r>
+              <a:rPr sz="1200" b="0">
+                <a:solidFill>
+                  <a:srgbClr val="F8FAFC"/>
+                </a:solidFill>
+                <a:latin typeface="Courier New"/>
+              </a:rPr>
+              <a:t>    print("action_space:     ", env.action_space)        # Discrete(2): 0=izq, 1=der</a:t>
+            </a:r>
+          </a:p>
+          <a:p>
+            <a:pPr>
+              <a:defRPr sz="1200" b="0">
+                <a:solidFill>
+                  <a:srgbClr val="F8FAFC"/>
+                </a:solidFill>
+                <a:latin typeface="Courier New"/>
+              </a:defRPr>
+            </a:pPr>
+            <a:r>
+              <a:rPr sz="1200" b="0">
+                <a:solidFill>
+                  <a:srgbClr val="F8FAFC"/>
+                </a:solidFill>
+                <a:latin typeface="Courier New"/>
+              </a:rPr>
+              <a:t>    env.close()</a:t>
+            </a:r>
+          </a:p>
+          <a:p>
+            <a:pPr>
+              <a:defRPr sz="1200" b="0">
+                <a:solidFill>
+                  <a:srgbClr val="F8FAFC"/>
+                </a:solidFill>
+                <a:latin typeface="Courier New"/>
+              </a:defRPr>
+            </a:pPr>
+            <a:r>
+              <a:rPr sz="1200" b="0">
+                <a:solidFill>
+                  <a:srgbClr val="F8FAFC"/>
+                </a:solidFill>
+                <a:latin typeface="Courier New"/>
+              </a:rPr>
+              <a:t>else:</a:t>
+            </a:r>
+          </a:p>
+          <a:p>
+            <a:pPr>
+              <a:defRPr sz="1200" b="0">
+                <a:solidFill>
+                  <a:srgbClr val="F8FAFC"/>
+                </a:solidFill>
+                <a:latin typeface="Courier New"/>
+              </a:defRPr>
+            </a:pPr>
+            <a:r>
+              <a:rPr sz="1200" b="0">
+                <a:solidFill>
+                  <a:srgbClr val="F8FAFC"/>
+                </a:solidFill>
+                <a:latin typeface="Courier New"/>
+              </a:rPr>
+              <a:t>    print("API:  env = gym.make('CartPole-v1')")</a:t>
+            </a:r>
+          </a:p>
+          <a:p>
+            <a:pPr>
+              <a:defRPr sz="1200" b="0">
+                <a:solidFill>
+                  <a:srgbClr val="F8FAFC"/>
+                </a:solidFill>
+                <a:latin typeface="Courier New"/>
+              </a:defRPr>
+            </a:pPr>
+            <a:r>
+              <a:rPr sz="1200" b="0">
+                <a:solidFill>
+                  <a:srgbClr val="F8FAFC"/>
+                </a:solidFill>
+                <a:latin typeface="Courier New"/>
+              </a:rPr>
+              <a:t>    print("      observation_space -&gt; Box([pos, vel, angulo, vel_ang], (4,), float32)")</a:t>
+            </a:r>
+          </a:p>
+          <a:p>
+            <a:pPr>
+              <a:defRPr sz="1200" b="0">
+                <a:solidFill>
+                  <a:srgbClr val="F8FAFC"/>
+                </a:solidFill>
+                <a:latin typeface="Courier New"/>
+              </a:defRPr>
+            </a:pPr>
+            <a:r>
+              <a:rPr sz="1200" b="0">
+                <a:solidFill>
+                  <a:srgbClr val="F8FAFC"/>
+                </a:solidFill>
+                <a:latin typeface="Courier New"/>
+              </a:rPr>
+              <a:t>    print("      action_space      -&gt; Discrete(2)  # 0=empujar izquierda, 1=empujar derecha")</a:t>
             </a:r>
           </a:p>
         </p:txBody>

--- a/docs/presentaciones/classes/clase-161-rl-aprendizaje-por-recompensa-openai-gymnasium-presentacion.pptx
+++ b/docs/presentaciones/classes/clase-161-rl-aprendizaje-por-recompensa-openai-gymnasium-presentacion.pptx
@@ -3272,7 +3272,7 @@
                 </a:solidFill>
                 <a:latin typeface="Segoe UI"/>
               </a:rPr>
-              <a:t>Parte: 2 — Deep Learning · Fuente: Géron, cap. 18 § Introduction to Reinforcement Learning + docs Gymnasium.  Duración estimada: 75 min.</a:t>
+              <a:t>Parte: 2 — Deep Learning · Fuente: Géron, cap. 18 § Introduction to Reinforcement Learning + docs Gymnasium.  Duración estimada: 75 min. · Nivel: Avanzado</a:t>
             </a:r>
           </a:p>
         </p:txBody>
@@ -3581,7 +3581,7 @@
                 </a:solidFill>
                 <a:latin typeface="Segoe UI"/>
               </a:rPr>
-              <a:t>Parte: 2 — Deep Learning · Fuente: Géron, cap. 18 § Introduction to Reinforcement Learning + docs Gymnasium.  Duración estimada: 75 min.</a:t>
+              <a:t>Parte: 2 — Deep Learning · Fuente: Géron, cap. 18 § Introduction to Reinforcement Learning + docs Gymnasium.  Duración estimada: 75 min. · Nivel: Avanzado</a:t>
             </a:r>
           </a:p>
         </p:txBody>
